--- a/assets/pptx/catalog-293.pptx
+++ b/assets/pptx/catalog-293.pptx
@@ -3446,7 +3446,7 @@
                 <a:ea typeface="Ebrima"/>
                 <a:cs typeface="Ebrima"/>
               </a:rPr>
-              <a:t>የተስፋው ጨለማ ተወገደ (2x) [5]</a:t>
+              <a:t>የተስፋው ጨለማ ተወገደ 2x [5]</a:t>
             </a:r>
           </a:p>
         </p:txBody>
@@ -3567,7 +3567,7 @@
                 <a:ea typeface="Ebrima"/>
                 <a:cs typeface="Ebrima"/>
               </a:rPr>
-              <a:t>ፍሬ አለው በኋላ (2x)</a:t>
+              <a:t>ፍሬ አለው በኋላ 2x</a:t>
             </a:r>
           </a:p>
         </p:txBody>
@@ -3832,7 +3832,7 @@
                 <a:ea typeface="Ebrima"/>
                 <a:cs typeface="Ebrima"/>
               </a:rPr>
-              <a:t>የእያሪኮን ቅጥር አፈረሱ (2x)</a:t>
+              <a:t>የእያሪኮን ቅጥር አፈረሱ 2x</a:t>
             </a:r>
           </a:p>
         </p:txBody>
@@ -3953,7 +3953,7 @@
                 <a:ea typeface="Ebrima"/>
                 <a:cs typeface="Ebrima"/>
               </a:rPr>
-              <a:t>ፍሬ አለው በኋላ (2x)</a:t>
+              <a:t>ፍሬ አለው በኋላ 2x</a:t>
             </a:r>
           </a:p>
         </p:txBody>
@@ -4218,7 +4218,7 @@
                 <a:ea typeface="Ebrima"/>
                 <a:cs typeface="Ebrima"/>
               </a:rPr>
-              <a:t>ሳሙኤልን . (1) . ወለደች (2x) [9]</a:t>
+              <a:t>ሳሙኤልን . 1 . ወለደች 2x [9]</a:t>
             </a:r>
           </a:p>
         </p:txBody>
@@ -4339,7 +4339,7 @@
                 <a:ea typeface="Ebrima"/>
                 <a:cs typeface="Ebrima"/>
               </a:rPr>
-              <a:t>ፍሬ አለው በኋላ (2x)</a:t>
+              <a:t>ፍሬ አለው በኋላ 2x</a:t>
             </a:r>
           </a:p>
         </p:txBody>
@@ -4604,7 +4604,7 @@
                 <a:ea typeface="Ebrima"/>
                 <a:cs typeface="Ebrima"/>
               </a:rPr>
-              <a:t>ሟችሁን ከሙት በሃል አወጣ (2x)</a:t>
+              <a:t>ሟችሁን ከሙት በሃል አወጣ 2x</a:t>
             </a:r>
           </a:p>
         </p:txBody>
@@ -4725,7 +4725,7 @@
                 <a:ea typeface="Ebrima"/>
                 <a:cs typeface="Ebrima"/>
               </a:rPr>
-              <a:t>ፍሬ አለው በኋላ (2x)</a:t>
+              <a:t>ፍሬ አለው በኋላ 2x</a:t>
             </a:r>
           </a:p>
         </p:txBody>
